--- a/prezentacija/Pravna_Informatika_Prezentacija.pptx
+++ b/prezentacija/Pravna_Informatika_Prezentacija.pptx
@@ -9390,7 +9390,29 @@
                 <a:ea typeface="Calibri" pitchFamily="34" charset="-122"/>
                 <a:cs typeface="Calibri" pitchFamily="34" charset="-120"/>
               </a:rPr>
-              <a:t>+ pravnih normi modelovanih u LegalRuleML</a:t>
+              <a:t>+ </a:t>
+            </a:r>
+            <a:r>
+              <a:rPr lang="en-US" sz="1320" dirty="0" err="1">
+                <a:solidFill>
+                  <a:srgbClr val="22302A"/>
+                </a:solidFill>
+                <a:latin typeface="Calibri" pitchFamily="34" charset="0"/>
+                <a:ea typeface="Calibri" pitchFamily="34" charset="-122"/>
+                <a:cs typeface="Calibri" pitchFamily="34" charset="-120"/>
+              </a:rPr>
+              <a:t>pravila</a:t>
+            </a:r>
+            <a:r>
+              <a:rPr lang="en-US" sz="1320" dirty="0">
+                <a:solidFill>
+                  <a:srgbClr val="22302A"/>
+                </a:solidFill>
+                <a:latin typeface="Calibri" pitchFamily="34" charset="0"/>
+                <a:ea typeface="Calibri" pitchFamily="34" charset="-122"/>
+                <a:cs typeface="Calibri" pitchFamily="34" charset="-120"/>
+              </a:rPr>
+              <a:t> modelovanih u LegalRuleML</a:t>
             </a:r>
             <a:endParaRPr lang="en-US" sz="1320" dirty="0"/>
           </a:p>
